--- a/output/04-professional-skills/04-01-business-communication.pptx
+++ b/output/04-professional-skills/04-01-business-communication.pptx
@@ -26266,7 +26266,7 @@
                 </a:solidFill>
                 <a:latin typeface="Segoe UI"/>
               </a:rPr>
-              <a:t>Almost nobody reaches the end of a work email. Your question sits below the point where the reader stopped, meaning to come back later.</a:t>
+              <a:t>Most people skim a work email rather than read it end to end. Your question sits below the point where the reader stopped, meaning to come back later.</a:t>
             </a:r>
           </a:p>
         </p:txBody>
@@ -33981,7 +33981,7 @@
                 </a:solidFill>
                 <a:latin typeface="Segoe UI"/>
               </a:rPr>
-              <a:t>Reliably. Three asks in one email produces one answer, and you cannot tell from the reply which of the other two were even read.</a:t>
+              <a:t>In practice, three asks in one email tend to produce one answer, and you cannot tell from the reply which of the other two were even read.</a:t>
             </a:r>
           </a:p>
         </p:txBody>
